--- a/system-design-101/vi/lessons/sd-06-011/slides/sd-06-011.pptx
+++ b/system-design-101/vi/lessons/sd-06-011/slides/sd-06-011.pptx
@@ -1705,7 +1705,7 @@
         <p:spPr>
           <a:xfrm>
             <a:off x="914400" y="1524000"/>
-            <a:ext cx="16459200" cy="2476500"/>
+            <a:ext cx="16459200" cy="2571750"/>
           </a:xfrm>
           <a:prstGeom prst="rect">
             <a:avLst/>
@@ -1721,7 +1721,7 @@
               <a:buNone/>
             </a:pPr>
             <a:r>
-              <a:rPr lang="en-US" sz="7500" dirty="0" spc="8" kern="0">
+              <a:rPr lang="en-US" sz="8100" dirty="0" spc="8" kern="0">
                 <a:solidFill>
                   <a:srgbClr val="F3EEE3"/>
                 </a:solidFill>
@@ -1732,7 +1732,7 @@
               <a:t>Memcached</a:t>
             </a:r>
             <a:r>
-              <a:rPr lang="en-US" sz="7500" dirty="0" spc="-82" kern="0">
+              <a:rPr lang="en-US" sz="8100" dirty="0" spc="-86" kern="0">
                 <a:solidFill>
                   <a:srgbClr val="F3EEE3"/>
                 </a:solidFill>
@@ -1743,7 +1743,7 @@
               <a:t> và</a:t>
             </a:r>
             <a:r>
-              <a:rPr lang="en-US" sz="7500" dirty="0" spc="-21" kern="0">
+              <a:rPr lang="en-US" sz="8100" dirty="0" spc="-25" kern="0">
                 <a:solidFill>
                   <a:srgbClr val="F3EEE3"/>
                 </a:solidFill>
@@ -1754,7 +1754,7 @@
               <a:t> Redis</a:t>
             </a:r>
             <a:r>
-              <a:rPr lang="en-US" sz="7500" dirty="0" spc="1" kern="0">
+              <a:rPr lang="en-US" sz="8100" dirty="0" spc="0" kern="0">
                 <a:solidFill>
                   <a:srgbClr val="F3EEE3"/>
                 </a:solidFill>
@@ -1765,7 +1765,7 @@
               <a:t> khác</a:t>
             </a:r>
             <a:r>
-              <a:rPr lang="en-US" sz="7500" dirty="0" spc="2" kern="0">
+              <a:rPr lang="en-US" sz="8100" dirty="0" spc="1" kern="0">
                 <a:solidFill>
                   <a:srgbClr val="F3EEE3"/>
                 </a:solidFill>
@@ -1776,7 +1776,7 @@
               <a:t> nhau</a:t>
             </a:r>
             <a:r>
-              <a:rPr lang="en-US" sz="7500" dirty="0" spc="1" kern="0">
+              <a:rPr lang="en-US" sz="8100" dirty="0" spc="0" kern="0">
                 <a:solidFill>
                   <a:srgbClr val="F3EEE3"/>
                 </a:solidFill>
@@ -1784,9 +1784,20 @@
                 <a:ea typeface="Bricolage Grotesque ExtraBold" pitchFamily="34" charset="-122"/>
                 <a:cs typeface="Bricolage Grotesque ExtraBold" pitchFamily="34" charset="-120"/>
               </a:rPr>
-              <a:t> thế nào</a:t>
-            </a:r>
-            <a:endParaRPr lang="en-US" sz="7500" dirty="0"/>
+              <a:t> thế</a:t>
+            </a:r>
+            <a:r>
+              <a:rPr lang="en-US" sz="8100" dirty="0" spc="2" kern="0">
+                <a:solidFill>
+                  <a:srgbClr val="F3EEE3"/>
+                </a:solidFill>
+                <a:latin typeface="Bricolage Grotesque ExtraBold" pitchFamily="34" charset="0"/>
+                <a:ea typeface="Bricolage Grotesque ExtraBold" pitchFamily="34" charset="-122"/>
+                <a:cs typeface="Bricolage Grotesque ExtraBold" pitchFamily="34" charset="-120"/>
+              </a:rPr>
+              <a:t> nào</a:t>
+            </a:r>
+            <a:endParaRPr lang="en-US" sz="8100" dirty="0"/>
           </a:p>
         </p:txBody>
       </p:sp>

--- a/system-design-101/vi/lessons/sd-06-011/slides/sd-06-011.pptx
+++ b/system-design-101/vi/lessons/sd-06-011/slides/sd-06-011.pptx
@@ -2507,7 +2507,7 @@
               <a:buNone/>
             </a:pPr>
             <a:r>
-              <a:rPr lang="en-US" sz="3450" dirty="0" spc="-1" kern="0">
+              <a:rPr lang="en-US" sz="3450" dirty="0" spc="2" kern="0">
                 <a:solidFill>
                   <a:srgbClr val="14161C"/>
                 </a:solidFill>
@@ -2515,10 +2515,10 @@
                 <a:ea typeface="Be Vietnam Pro ExtraBold" pitchFamily="34" charset="-122"/>
                 <a:cs typeface="Be Vietnam Pro ExtraBold" pitchFamily="34" charset="-120"/>
               </a:rPr>
-              <a:t>Chỉ</a:t>
-            </a:r>
-            <a:r>
-              <a:rPr lang="en-US" sz="3450" dirty="0" spc="1" kern="0">
+              <a:t>Giá</a:t>
+            </a:r>
+            <a:r>
+              <a:rPr lang="en-US" sz="3450" dirty="0" spc="9" kern="0">
                 <a:solidFill>
                   <a:srgbClr val="14161C"/>
                 </a:solidFill>
@@ -2526,10 +2526,10 @@
                 <a:ea typeface="Be Vietnam Pro ExtraBold" pitchFamily="34" charset="-122"/>
                 <a:cs typeface="Be Vietnam Pro ExtraBold" pitchFamily="34" charset="-120"/>
               </a:rPr>
-              <a:t> đặt</a:t>
-            </a:r>
-            <a:r>
-              <a:rPr lang="en-US" sz="3450" dirty="0" spc="-32" kern="0">
+              <a:t> trị</a:t>
+            </a:r>
+            <a:r>
+              <a:rPr lang="en-US" sz="3450" dirty="0" spc="-8" kern="0">
                 <a:solidFill>
                   <a:srgbClr val="14161C"/>
                 </a:solidFill>
@@ -2537,10 +2537,10 @@
                 <a:ea typeface="Be Vietnam Pro ExtraBold" pitchFamily="34" charset="-122"/>
                 <a:cs typeface="Be Vietnam Pro ExtraBold" pitchFamily="34" charset="-120"/>
               </a:rPr>
-              <a:t> và</a:t>
-            </a:r>
-            <a:r>
-              <a:rPr lang="en-US" sz="3450" dirty="0" spc="-13" kern="0">
+              <a:t> là</a:t>
+            </a:r>
+            <a:r>
+              <a:rPr lang="en-US" sz="3450" dirty="0" spc="-2" kern="0">
                 <a:solidFill>
                   <a:srgbClr val="14161C"/>
                 </a:solidFill>
@@ -2548,7 +2548,73 @@
                 <a:ea typeface="Be Vietnam Pro ExtraBold" pitchFamily="34" charset="-122"/>
                 <a:cs typeface="Be Vietnam Pro ExtraBold" pitchFamily="34" charset="-120"/>
               </a:rPr>
-              <a:t> lấy.</a:t>
+              <a:t> khối</a:t>
+            </a:r>
+            <a:r>
+              <a:rPr lang="en-US" sz="3450" dirty="0" spc="-11" kern="0">
+                <a:solidFill>
+                  <a:srgbClr val="14161C"/>
+                </a:solidFill>
+                <a:latin typeface="Be Vietnam Pro ExtraBold" pitchFamily="34" charset="0"/>
+                <a:ea typeface="Be Vietnam Pro ExtraBold" pitchFamily="34" charset="-122"/>
+                <a:cs typeface="Be Vietnam Pro ExtraBold" pitchFamily="34" charset="-120"/>
+              </a:rPr>
+              <a:t> byte,</a:t>
+            </a:r>
+            <a:r>
+              <a:rPr lang="en-US" sz="3450" dirty="0" spc="55" kern="0">
+                <a:solidFill>
+                  <a:srgbClr val="14161C"/>
+                </a:solidFill>
+                <a:latin typeface="Be Vietnam Pro ExtraBold" pitchFamily="34" charset="0"/>
+                <a:ea typeface="Be Vietnam Pro ExtraBold" pitchFamily="34" charset="-122"/>
+                <a:cs typeface="Be Vietnam Pro ExtraBold" pitchFamily="34" charset="-120"/>
+              </a:rPr>
+              <a:t> lưu</a:t>
+            </a:r>
+            <a:r>
+              <a:rPr lang="en-US" sz="3450" dirty="0" spc="-32" kern="0">
+                <a:solidFill>
+                  <a:srgbClr val="14161C"/>
+                </a:solidFill>
+                <a:latin typeface="Be Vietnam Pro ExtraBold" pitchFamily="34" charset="0"/>
+                <a:ea typeface="Be Vietnam Pro ExtraBold" pitchFamily="34" charset="-122"/>
+                <a:cs typeface="Be Vietnam Pro ExtraBold" pitchFamily="34" charset="-120"/>
+              </a:rPr>
+              <a:t> và</a:t>
+            </a:r>
+            <a:r>
+              <a:rPr lang="en-US" sz="3450" dirty="0" spc="-16" kern="0">
+                <a:solidFill>
+                  <a:srgbClr val="14161C"/>
+                </a:solidFill>
+                <a:latin typeface="Be Vietnam Pro ExtraBold" pitchFamily="34" charset="0"/>
+                <a:ea typeface="Be Vietnam Pro ExtraBold" pitchFamily="34" charset="-122"/>
+                <a:cs typeface="Be Vietnam Pro ExtraBold" pitchFamily="34" charset="-120"/>
+              </a:rPr>
+              <a:t> lấy</a:t>
+            </a:r>
+            <a:r>
+              <a:rPr lang="en-US" sz="3450" dirty="0" spc="-8" kern="0">
+                <a:solidFill>
+                  <a:srgbClr val="14161C"/>
+                </a:solidFill>
+                <a:latin typeface="Be Vietnam Pro ExtraBold" pitchFamily="34" charset="0"/>
+                <a:ea typeface="Be Vietnam Pro ExtraBold" pitchFamily="34" charset="-122"/>
+                <a:cs typeface="Be Vietnam Pro ExtraBold" pitchFamily="34" charset="-120"/>
+              </a:rPr>
+              <a:t> theo</a:t>
+            </a:r>
+            <a:r>
+              <a:rPr lang="en-US" sz="3450" dirty="0" spc="-5" kern="0">
+                <a:solidFill>
+                  <a:srgbClr val="14161C"/>
+                </a:solidFill>
+                <a:latin typeface="Be Vietnam Pro ExtraBold" pitchFamily="34" charset="0"/>
+                <a:ea typeface="Be Vietnam Pro ExtraBold" pitchFamily="34" charset="-122"/>
+                <a:cs typeface="Be Vietnam Pro ExtraBold" pitchFamily="34" charset="-120"/>
+              </a:rPr>
+              <a:t> khóa.</a:t>
             </a:r>
             <a:endParaRPr lang="en-US" sz="3450" dirty="0"/>
           </a:p>

--- a/system-design-101/vi/lessons/sd-06-011/slides/sd-06-011.pptx
+++ b/system-design-101/vi/lessons/sd-06-011/slides/sd-06-011.pptx
@@ -2347,7 +2347,7 @@
               <a:buNone/>
             </a:pPr>
             <a:r>
-              <a:rPr lang="en-US" sz="6300" dirty="0" spc="-17" kern="0">
+              <a:rPr lang="en-US" sz="6900" dirty="0" spc="-14" kern="0">
                 <a:solidFill>
                   <a:srgbClr val="14161C"/>
                 </a:solidFill>
@@ -2358,7 +2358,7 @@
               <a:t>Redis:</a:t>
             </a:r>
             <a:r>
-              <a:rPr lang="en-US" sz="6300" dirty="0" spc="-6" kern="0">
+              <a:rPr lang="en-US" sz="6900" dirty="0" spc="-11" kern="0">
                 <a:solidFill>
                   <a:srgbClr val="14161C"/>
                 </a:solidFill>
@@ -2369,7 +2369,7 @@
               <a:t> một</a:t>
             </a:r>
             <a:r>
-              <a:rPr lang="en-US" sz="6300" dirty="0" spc="5" kern="0">
+              <a:rPr lang="en-US" sz="6900" dirty="0" spc="5" kern="0">
                 <a:solidFill>
                   <a:srgbClr val="14161C"/>
                 </a:solidFill>
@@ -2380,7 +2380,7 @@
               <a:t> memcached</a:t>
             </a:r>
             <a:r>
-              <a:rPr lang="en-US" sz="6300" dirty="0" spc="-46" kern="0">
+              <a:rPr lang="en-US" sz="6900" dirty="0" spc="-55" kern="0">
                 <a:solidFill>
                   <a:srgbClr val="14161C"/>
                 </a:solidFill>
@@ -2391,7 +2391,7 @@
               <a:t> phức</a:t>
             </a:r>
             <a:r>
-              <a:rPr lang="en-US" sz="6300" dirty="0" spc="-2" kern="0">
+              <a:rPr lang="en-US" sz="6900" dirty="0" spc="-6" kern="0">
                 <a:solidFill>
                   <a:srgbClr val="14161C"/>
                 </a:solidFill>
@@ -2402,7 +2402,7 @@
               <a:t> tạp</a:t>
             </a:r>
             <a:r>
-              <a:rPr lang="en-US" sz="6300" dirty="0" spc="-35" kern="0">
+              <a:rPr lang="en-US" sz="6900" dirty="0" spc="-42" kern="0">
                 <a:solidFill>
                   <a:srgbClr val="14161C"/>
                 </a:solidFill>
@@ -2412,7 +2412,7 @@
               </a:rPr>
               <a:t> hơn</a:t>
             </a:r>
-            <a:endParaRPr lang="en-US" sz="6300" dirty="0"/>
+            <a:endParaRPr lang="en-US" sz="6900" dirty="0"/>
           </a:p>
         </p:txBody>
       </p:sp>
@@ -4214,7 +4214,7 @@
               <a:buNone/>
             </a:pPr>
             <a:r>
-              <a:rPr lang="en-US" sz="6300" dirty="0" spc="2" kern="0">
+              <a:rPr lang="en-US" sz="6900" dirty="0" spc="-1" kern="0">
                 <a:solidFill>
                   <a:srgbClr val="F3EEE3"/>
                 </a:solidFill>
@@ -4222,10 +4222,10 @@
                 <a:ea typeface="Bricolage Grotesque ExtraBold" pitchFamily="34" charset="-122"/>
                 <a:cs typeface="Bricolage Grotesque ExtraBold" pitchFamily="34" charset="-120"/>
               </a:rPr>
-              <a:t>Bốn</a:t>
-            </a:r>
-            <a:r>
-              <a:rPr lang="en-US" sz="6300" dirty="0" spc="0" kern="0">
+              <a:t>Bốn khác</a:t>
+            </a:r>
+            <a:r>
+              <a:rPr lang="en-US" sz="6900" dirty="0" spc="2" kern="0">
                 <a:solidFill>
                   <a:srgbClr val="F3EEE3"/>
                 </a:solidFill>
@@ -4233,10 +4233,10 @@
                 <a:ea typeface="Bricolage Grotesque ExtraBold" pitchFamily="34" charset="-122"/>
                 <a:cs typeface="Bricolage Grotesque ExtraBold" pitchFamily="34" charset="-120"/>
               </a:rPr>
-              <a:t> khác</a:t>
-            </a:r>
-            <a:r>
-              <a:rPr lang="en-US" sz="6300" dirty="0" spc="2" kern="0">
+              <a:t> biệt</a:t>
+            </a:r>
+            <a:r>
+              <a:rPr lang="en-US" sz="6900" dirty="0" spc="12" kern="0">
                 <a:solidFill>
                   <a:srgbClr val="F3EEE3"/>
                 </a:solidFill>
@@ -4244,10 +4244,10 @@
                 <a:ea typeface="Bricolage Grotesque ExtraBold" pitchFamily="34" charset="-122"/>
                 <a:cs typeface="Bricolage Grotesque ExtraBold" pitchFamily="34" charset="-120"/>
               </a:rPr>
-              <a:t> biệt</a:t>
-            </a:r>
-            <a:r>
-              <a:rPr lang="en-US" sz="6300" dirty="0" spc="13" kern="0">
+              <a:t> đã</a:t>
+            </a:r>
+            <a:r>
+              <a:rPr lang="en-US" sz="6900" dirty="0" spc="-1" kern="0">
                 <a:solidFill>
                   <a:srgbClr val="F3EEE3"/>
                 </a:solidFill>
@@ -4255,10 +4255,10 @@
                 <a:ea typeface="Bricolage Grotesque ExtraBold" pitchFamily="34" charset="-122"/>
                 <a:cs typeface="Bricolage Grotesque ExtraBold" pitchFamily="34" charset="-120"/>
               </a:rPr>
-              <a:t> đã</a:t>
-            </a:r>
-            <a:r>
-              <a:rPr lang="en-US" sz="6300" dirty="0" spc="0" kern="0">
+              <a:t> chạy</a:t>
+            </a:r>
+            <a:r>
+              <a:rPr lang="en-US" sz="6900" dirty="0" spc="0" kern="0">
                 <a:solidFill>
                   <a:srgbClr val="F3EEE3"/>
                 </a:solidFill>
@@ -4266,20 +4266,9 @@
                 <a:ea typeface="Bricolage Grotesque ExtraBold" pitchFamily="34" charset="-122"/>
                 <a:cs typeface="Bricolage Grotesque ExtraBold" pitchFamily="34" charset="-120"/>
               </a:rPr>
-              <a:t> chạy</a:t>
-            </a:r>
-            <a:r>
-              <a:rPr lang="en-US" sz="6300" dirty="0" spc="5" kern="0">
-                <a:solidFill>
-                  <a:srgbClr val="F3EEE3"/>
-                </a:solidFill>
-                <a:latin typeface="Bricolage Grotesque ExtraBold" pitchFamily="34" charset="0"/>
-                <a:ea typeface="Bricolage Grotesque ExtraBold" pitchFamily="34" charset="-122"/>
-                <a:cs typeface="Bricolage Grotesque ExtraBold" pitchFamily="34" charset="-120"/>
-              </a:rPr>
               <a:t> thử</a:t>
             </a:r>
-            <a:endParaRPr lang="en-US" sz="6300" dirty="0"/>
+            <a:endParaRPr lang="en-US" sz="6900" dirty="0"/>
           </a:p>
         </p:txBody>
       </p:sp>
@@ -5832,7 +5821,7 @@
               <a:buNone/>
             </a:pPr>
             <a:r>
-              <a:rPr lang="en-US" sz="6300" dirty="0" spc="0" kern="0">
+              <a:rPr lang="en-US" sz="6900" dirty="0" spc="0" kern="0">
                 <a:solidFill>
                   <a:srgbClr val="F3EEE3"/>
                 </a:solidFill>
@@ -5843,7 +5832,7 @@
               <a:t>Mỗi</a:t>
             </a:r>
             <a:r>
-              <a:rPr lang="en-US" sz="6300" dirty="0" spc="-58" kern="0">
+              <a:rPr lang="en-US" sz="6900" dirty="0" spc="-66" kern="0">
                 <a:solidFill>
                   <a:srgbClr val="F3EEE3"/>
                 </a:solidFill>
@@ -5854,7 +5843,7 @@
               <a:t> người</a:t>
             </a:r>
             <a:r>
-              <a:rPr lang="en-US" sz="6300" dirty="0" spc="1" kern="0">
+              <a:rPr lang="en-US" sz="6900" dirty="0" spc="2" kern="0">
                 <a:solidFill>
                   <a:srgbClr val="F3EEE3"/>
                 </a:solidFill>
@@ -5865,7 +5854,7 @@
               <a:t> dùng</a:t>
             </a:r>
             <a:r>
-              <a:rPr lang="en-US" sz="6300" dirty="0" spc="-6" kern="0">
+              <a:rPr lang="en-US" sz="6900" dirty="0" spc="-10" kern="0">
                 <a:solidFill>
                   <a:srgbClr val="F3EEE3"/>
                 </a:solidFill>
@@ -5876,7 +5865,7 @@
               <a:t> một</a:t>
             </a:r>
             <a:r>
-              <a:rPr lang="en-US" sz="6300" dirty="0" spc="3" kern="0">
+              <a:rPr lang="en-US" sz="6900" dirty="0" spc="1" kern="0">
                 <a:solidFill>
                   <a:srgbClr val="F3EEE3"/>
                 </a:solidFill>
@@ -5886,7 +5875,7 @@
               </a:rPr>
               <a:t> bit</a:t>
             </a:r>
-            <a:endParaRPr lang="en-US" sz="6300" dirty="0"/>
+            <a:endParaRPr lang="en-US" sz="6900" dirty="0"/>
           </a:p>
         </p:txBody>
       </p:sp>
@@ -6664,7 +6653,7 @@
               <a:buNone/>
             </a:pPr>
             <a:r>
-              <a:rPr lang="en-US" sz="6300" dirty="0" spc="4" kern="0">
+              <a:rPr lang="en-US" sz="6900" dirty="0" spc="6" kern="0">
                 <a:solidFill>
                   <a:srgbClr val="14161C"/>
                 </a:solidFill>
@@ -6675,7 +6664,7 @@
               <a:t>Chọn</a:t>
             </a:r>
             <a:r>
-              <a:rPr lang="en-US" sz="6300" dirty="0" spc="0" kern="0">
+              <a:rPr lang="en-US" sz="6900" dirty="0" spc="0" kern="0">
                 <a:solidFill>
                   <a:srgbClr val="14161C"/>
                 </a:solidFill>
@@ -6686,7 +6675,7 @@
               <a:t> cái</a:t>
             </a:r>
             <a:r>
-              <a:rPr lang="en-US" sz="6300" dirty="0" spc="2" kern="0">
+              <a:rPr lang="en-US" sz="6900" dirty="0" spc="2" kern="0">
                 <a:solidFill>
                   <a:srgbClr val="14161C"/>
                 </a:solidFill>
@@ -6696,7 +6685,7 @@
               </a:rPr>
               <a:t> nào</a:t>
             </a:r>
-            <a:endParaRPr lang="en-US" sz="6300" dirty="0"/>
+            <a:endParaRPr lang="en-US" sz="6900" dirty="0"/>
           </a:p>
         </p:txBody>
       </p:sp>
@@ -8026,7 +8015,7 @@
               <a:buNone/>
             </a:pPr>
             <a:r>
-              <a:rPr lang="en-US" sz="6300" dirty="0" spc="5" kern="0">
+              <a:rPr lang="en-US" sz="6900" dirty="0" spc="5" kern="0">
                 <a:solidFill>
                   <a:srgbClr val="14161C"/>
                 </a:solidFill>
@@ -8037,7 +8026,7 @@
               <a:t>Đếm</a:t>
             </a:r>
             <a:r>
-              <a:rPr lang="en-US" sz="6300" dirty="0" spc="-62" kern="0">
+              <a:rPr lang="en-US" sz="6900" dirty="0" spc="-72" kern="0">
                 <a:solidFill>
                   <a:srgbClr val="14161C"/>
                 </a:solidFill>
@@ -8048,7 +8037,7 @@
               <a:t> lượt</a:t>
             </a:r>
             <a:r>
-              <a:rPr lang="en-US" sz="6300" dirty="0" spc="2" kern="0">
+              <a:rPr lang="en-US" sz="6900" dirty="0" spc="0" kern="0">
                 <a:solidFill>
                   <a:srgbClr val="14161C"/>
                 </a:solidFill>
@@ -8059,7 +8048,7 @@
               <a:t> thích,</a:t>
             </a:r>
             <a:r>
-              <a:rPr lang="en-US" sz="6300" dirty="0" spc="-1" kern="0">
+              <a:rPr lang="en-US" sz="6900" dirty="0" spc="-2" kern="0">
                 <a:solidFill>
                   <a:srgbClr val="14161C"/>
                 </a:solidFill>
@@ -8070,7 +8059,7 @@
               <a:t> lấy</a:t>
             </a:r>
             <a:r>
-              <a:rPr lang="en-US" sz="6300" dirty="0" spc="4" kern="0">
+              <a:rPr lang="en-US" sz="6900" dirty="0" spc="1" kern="0">
                 <a:solidFill>
                   <a:srgbClr val="14161C"/>
                 </a:solidFill>
@@ -8081,7 +8070,7 @@
               <a:t> 10</a:t>
             </a:r>
             <a:r>
-              <a:rPr lang="en-US" sz="6300" dirty="0" spc="-2" kern="0">
+              <a:rPr lang="en-US" sz="6900" dirty="0" spc="-4" kern="0">
                 <a:solidFill>
                   <a:srgbClr val="14161C"/>
                 </a:solidFill>
@@ -8092,7 +8081,7 @@
               <a:t> bài</a:t>
             </a:r>
             <a:r>
-              <a:rPr lang="en-US" sz="6300" dirty="0" spc="9" kern="0">
+              <a:rPr lang="en-US" sz="6900" dirty="0" spc="10" kern="0">
                 <a:solidFill>
                   <a:srgbClr val="14161C"/>
                 </a:solidFill>
@@ -8102,7 +8091,7 @@
               </a:rPr>
               <a:t> đầu</a:t>
             </a:r>
-            <a:endParaRPr lang="en-US" sz="6300" dirty="0"/>
+            <a:endParaRPr lang="en-US" sz="6900" dirty="0"/>
           </a:p>
         </p:txBody>
       </p:sp>
@@ -9281,7 +9270,7 @@
               <a:buNone/>
             </a:pPr>
             <a:r>
-              <a:rPr lang="en-US" sz="6300" dirty="0" spc="0" kern="0">
+              <a:rPr lang="en-US" sz="6900" dirty="0" spc="-2" kern="0">
                 <a:solidFill>
                   <a:srgbClr val="F3EEE3"/>
                 </a:solidFill>
@@ -9292,7 +9281,7 @@
               <a:t>Bài</a:t>
             </a:r>
             <a:r>
-              <a:rPr lang="en-US" sz="6300" dirty="0" spc="1" kern="0">
+              <a:rPr lang="en-US" sz="6900" dirty="0" spc="0" kern="0">
                 <a:solidFill>
                   <a:srgbClr val="F3EEE3"/>
                 </a:solidFill>
@@ -9303,7 +9292,7 @@
               <a:t> này</a:t>
             </a:r>
             <a:r>
-              <a:rPr lang="en-US" sz="6300" dirty="0" spc="3" kern="0">
+              <a:rPr lang="en-US" sz="6900" dirty="0" spc="3" kern="0">
                 <a:solidFill>
                   <a:srgbClr val="F3EEE3"/>
                 </a:solidFill>
@@ -9314,7 +9303,7 @@
               <a:t> kiểm</a:t>
             </a:r>
             <a:r>
-              <a:rPr lang="en-US" sz="6300" dirty="0" spc="-2" kern="0">
+              <a:rPr lang="en-US" sz="6900" dirty="0" spc="-3" kern="0">
                 <a:solidFill>
                   <a:srgbClr val="F3EEE3"/>
                 </a:solidFill>
@@ -9325,7 +9314,7 @@
               <a:t> bằng</a:t>
             </a:r>
             <a:r>
-              <a:rPr lang="en-US" sz="6300" dirty="0" spc="0" kern="0">
+              <a:rPr lang="en-US" sz="6900" dirty="0" spc="-1" kern="0">
                 <a:solidFill>
                   <a:srgbClr val="F3EEE3"/>
                 </a:solidFill>
@@ -9335,7 +9324,7 @@
               </a:rPr>
               <a:t> cách chạy</a:t>
             </a:r>
-            <a:endParaRPr lang="en-US" sz="6300" dirty="0"/>
+            <a:endParaRPr lang="en-US" sz="6900" dirty="0"/>
           </a:p>
         </p:txBody>
       </p:sp>

--- a/system-design-101/vi/lessons/sd-06-011/slides/sd-06-011.pptx
+++ b/system-design-101/vi/lessons/sd-06-011/slides/sd-06-011.pptx
@@ -2750,7 +2750,7 @@
               <a:t> list,</a:t>
             </a:r>
             <a:r>
-              <a:rPr lang="en-US" sz="3450" dirty="0" spc="-10" kern="0">
+              <a:rPr lang="en-US" sz="3450" dirty="0" spc="-9" kern="0">
                 <a:solidFill>
                   <a:srgbClr val="F3EEE3"/>
                 </a:solidFill>
@@ -2758,29 +2758,7 @@
                 <a:ea typeface="Be Vietnam Pro ExtraBold" pitchFamily="34" charset="-122"/>
                 <a:cs typeface="Be Vietnam Pro ExtraBold" pitchFamily="34" charset="-120"/>
               </a:rPr>
-              <a:t> set</a:t>
-            </a:r>
-            <a:r>
-              <a:rPr lang="en-US" sz="3450" dirty="0" spc="-31" kern="0">
-                <a:solidFill>
-                  <a:srgbClr val="F3EEE3"/>
-                </a:solidFill>
-                <a:latin typeface="Be Vietnam Pro ExtraBold" pitchFamily="34" charset="0"/>
-                <a:ea typeface="Be Vietnam Pro ExtraBold" pitchFamily="34" charset="-122"/>
-                <a:cs typeface="Be Vietnam Pro ExtraBold" pitchFamily="34" charset="-120"/>
-              </a:rPr>
-              <a:t> và</a:t>
-            </a:r>
-            <a:r>
-              <a:rPr lang="en-US" sz="3450" dirty="0" spc="3" kern="0">
-                <a:solidFill>
-                  <a:srgbClr val="F3EEE3"/>
-                </a:solidFill>
-                <a:latin typeface="Be Vietnam Pro ExtraBold" pitchFamily="34" charset="0"/>
-                <a:ea typeface="Be Vietnam Pro ExtraBold" pitchFamily="34" charset="-122"/>
-                <a:cs typeface="Be Vietnam Pro ExtraBold" pitchFamily="34" charset="-120"/>
-              </a:rPr>
-              <a:t> các</a:t>
+              <a:t> set,</a:t>
             </a:r>
             <a:r>
               <a:rPr lang="en-US" sz="3450" dirty="0" spc="5" kern="0">
@@ -2910,7 +2888,7 @@
               <a:t> mềm</a:t>
             </a:r>
             <a:r>
-              <a:rPr lang="en-US" sz="2400" dirty="0" spc="0" kern="0">
+              <a:rPr lang="en-US" sz="2400" dirty="0" spc="-4" kern="0">
                 <a:solidFill>
                   <a:srgbClr val="6B6A66"/>
                 </a:solidFill>
@@ -2918,10 +2896,10 @@
                 <a:ea typeface="Be Vietnam Pro" pitchFamily="34" charset="-122"/>
                 <a:cs typeface="Be Vietnam Pro" pitchFamily="34" charset="-120"/>
               </a:rPr>
-              <a:t> cạnh</a:t>
-            </a:r>
-            <a:r>
-              <a:rPr lang="en-US" sz="2400" dirty="0" spc="1" kern="0">
+              <a:t> song</a:t>
+            </a:r>
+            <a:r>
+              <a:rPr lang="en-US" sz="2400" dirty="0" spc="-3" kern="0">
                 <a:solidFill>
                   <a:srgbClr val="6B6A66"/>
                 </a:solidFill>
@@ -2929,7 +2907,7 @@
                 <a:ea typeface="Be Vietnam Pro" pitchFamily="34" charset="-122"/>
                 <a:cs typeface="Be Vietnam Pro" pitchFamily="34" charset="-120"/>
               </a:rPr>
-              <a:t> nhau</a:t>
+              <a:t> song</a:t>
             </a:r>
             <a:r>
               <a:rPr lang="en-US" sz="2400" dirty="0" spc="16" kern="0">
@@ -2943,7 +2921,7 @@
               <a:t> để</a:t>
             </a:r>
             <a:r>
-              <a:rPr lang="en-US" sz="2400" dirty="0" spc="-6" kern="0">
+              <a:rPr lang="en-US" sz="2400" dirty="0" spc="-8" kern="0">
                 <a:solidFill>
                   <a:srgbClr val="6B6A66"/>
                 </a:solidFill>
@@ -2951,10 +2929,10 @@
                 <a:ea typeface="Be Vietnam Pro" pitchFamily="34" charset="-122"/>
                 <a:cs typeface="Be Vietnam Pro" pitchFamily="34" charset="-120"/>
               </a:rPr>
-              <a:t> thấy</a:t>
-            </a:r>
-            <a:r>
-              <a:rPr lang="en-US" sz="2400" dirty="0" spc="0" kern="0">
+              <a:t> so</a:t>
+            </a:r>
+            <a:r>
+              <a:rPr lang="en-US" sz="2400" dirty="0" spc="-4" kern="0">
                 <a:solidFill>
                   <a:srgbClr val="6B6A66"/>
                 </a:solidFill>
@@ -2962,18 +2940,7 @@
                 <a:ea typeface="Be Vietnam Pro" pitchFamily="34" charset="-122"/>
                 <a:cs typeface="Be Vietnam Pro" pitchFamily="34" charset="-120"/>
               </a:rPr>
-              <a:t> khác</a:t>
-            </a:r>
-            <a:r>
-              <a:rPr lang="en-US" sz="2400" dirty="0" spc="-4" kern="0">
-                <a:solidFill>
-                  <a:srgbClr val="6B6A66"/>
-                </a:solidFill>
-                <a:latin typeface="Be Vietnam Pro" pitchFamily="34" charset="0"/>
-                <a:ea typeface="Be Vietnam Pro" pitchFamily="34" charset="-122"/>
-                <a:cs typeface="Be Vietnam Pro" pitchFamily="34" charset="-120"/>
-              </a:rPr>
-              <a:t> biệt.</a:t>
+              <a:t> sánh.</a:t>
             </a:r>
             <a:endParaRPr lang="en-US" sz="2400" dirty="0"/>
           </a:p>
@@ -3471,7 +3438,7 @@
               <a:t> hai</a:t>
             </a:r>
             <a:r>
-              <a:rPr lang="en-US" sz="6900" dirty="0" spc="0" kern="0">
+              <a:rPr lang="en-US" sz="6900" dirty="0" spc="1" kern="0">
                 <a:solidFill>
                   <a:srgbClr val="14161C"/>
                 </a:solidFill>
@@ -3479,29 +3446,7 @@
                 <a:ea typeface="Bricolage Grotesque ExtraBold" pitchFamily="34" charset="-122"/>
                 <a:cs typeface="Bricolage Grotesque ExtraBold" pitchFamily="34" charset="-120"/>
               </a:rPr>
-              <a:t> giữ</a:t>
-            </a:r>
-            <a:r>
-              <a:rPr lang="en-US" sz="6900" dirty="0" spc="-1" kern="0">
-                <a:solidFill>
-                  <a:srgbClr val="14161C"/>
-                </a:solidFill>
-                <a:latin typeface="Bricolage Grotesque ExtraBold" pitchFamily="34" charset="0"/>
-                <a:ea typeface="Bricolage Grotesque ExtraBold" pitchFamily="34" charset="-122"/>
-                <a:cs typeface="Bricolage Grotesque ExtraBold" pitchFamily="34" charset="-120"/>
-              </a:rPr>
-              <a:t> dữ</a:t>
-            </a:r>
-            <a:r>
-              <a:rPr lang="en-US" sz="6900" dirty="0" spc="7" kern="0">
-                <a:solidFill>
-                  <a:srgbClr val="14161C"/>
-                </a:solidFill>
-                <a:latin typeface="Bricolage Grotesque ExtraBold" pitchFamily="34" charset="0"/>
-                <a:ea typeface="Bricolage Grotesque ExtraBold" pitchFamily="34" charset="-122"/>
-                <a:cs typeface="Bricolage Grotesque ExtraBold" pitchFamily="34" charset="-120"/>
-              </a:rPr>
-              <a:t> liệu</a:t>
+              <a:t> lưu</a:t>
             </a:r>
             <a:r>
               <a:rPr lang="en-US" sz="6900" dirty="0" spc="-13" kern="0">
@@ -3618,7 +3563,7 @@
               <a:buNone/>
             </a:pPr>
             <a:r>
-              <a:rPr lang="en-US" sz="3000" dirty="0" spc="-10" kern="0">
+              <a:rPr lang="en-US" sz="3000" dirty="0" spc="1" kern="0">
                 <a:solidFill>
                   <a:srgbClr val="14161C"/>
                 </a:solidFill>
@@ -3626,10 +3571,10 @@
                 <a:ea typeface="Be Vietnam Pro ExtraBold" pitchFamily="34" charset="-122"/>
                 <a:cs typeface="Be Vietnam Pro ExtraBold" pitchFamily="34" charset="-120"/>
               </a:rPr>
-              <a:t>Đẩy</a:t>
-            </a:r>
-            <a:r>
-              <a:rPr lang="en-US" sz="3000" dirty="0" spc="-6" kern="0">
+              <a:t>Khi</a:t>
+            </a:r>
+            <a:r>
+              <a:rPr lang="en-US" sz="3000" dirty="0" spc="-2" kern="0">
                 <a:solidFill>
                   <a:srgbClr val="14161C"/>
                 </a:solidFill>
@@ -3637,10 +3582,10 @@
                 <a:ea typeface="Be Vietnam Pro ExtraBold" pitchFamily="34" charset="-122"/>
                 <a:cs typeface="Be Vietnam Pro ExtraBold" pitchFamily="34" charset="-120"/>
               </a:rPr>
-              <a:t> khóa</a:t>
-            </a:r>
-            <a:r>
-              <a:rPr lang="en-US" sz="3000" dirty="0" spc="4" kern="0">
+              <a:t> đầy:</a:t>
+            </a:r>
+            <a:r>
+              <a:rPr lang="en-US" sz="3000" dirty="0" spc="-10" kern="0">
                 <a:solidFill>
                   <a:srgbClr val="14161C"/>
                 </a:solidFill>
@@ -3648,10 +3593,10 @@
                 <a:ea typeface="Be Vietnam Pro ExtraBold" pitchFamily="34" charset="-122"/>
                 <a:cs typeface="Be Vietnam Pro ExtraBold" pitchFamily="34" charset="-120"/>
               </a:rPr>
-              <a:t> cũ</a:t>
-            </a:r>
-            <a:r>
-              <a:rPr lang="en-US" sz="3000" dirty="0" spc="3" kern="0">
+              <a:t> memcached</a:t>
+            </a:r>
+            <a:r>
+              <a:rPr lang="en-US" sz="3000" dirty="0" spc="1" kern="0">
                 <a:solidFill>
                   <a:srgbClr val="14161C"/>
                 </a:solidFill>
@@ -3659,10 +3604,10 @@
                 <a:ea typeface="Be Vietnam Pro ExtraBold" pitchFamily="34" charset="-122"/>
                 <a:cs typeface="Be Vietnam Pro ExtraBold" pitchFamily="34" charset="-120"/>
               </a:rPr>
-              <a:t> khi</a:t>
-            </a:r>
-            <a:r>
-              <a:rPr lang="en-US" sz="3000" dirty="0" spc="-2" kern="0">
+              <a:t> tự</a:t>
+            </a:r>
+            <a:r>
+              <a:rPr lang="en-US" sz="3000" dirty="0" spc="-3" kern="0">
                 <a:solidFill>
                   <a:srgbClr val="14161C"/>
                 </a:solidFill>
@@ -3670,10 +3615,10 @@
                 <a:ea typeface="Be Vietnam Pro ExtraBold" pitchFamily="34" charset="-122"/>
                 <a:cs typeface="Be Vietnam Pro ExtraBold" pitchFamily="34" charset="-120"/>
               </a:rPr>
-              <a:t> đầy:</a:t>
-            </a:r>
-            <a:r>
-              <a:rPr lang="en-US" sz="3000" dirty="0" spc="-10" kern="0">
+              <a:t> đẩy</a:t>
+            </a:r>
+            <a:r>
+              <a:rPr lang="en-US" sz="3000" dirty="0" spc="-6" kern="0">
                 <a:solidFill>
                   <a:srgbClr val="14161C"/>
                 </a:solidFill>
@@ -3681,10 +3626,10 @@
                 <a:ea typeface="Be Vietnam Pro ExtraBold" pitchFamily="34" charset="-122"/>
                 <a:cs typeface="Be Vietnam Pro ExtraBold" pitchFamily="34" charset="-120"/>
               </a:rPr>
-              <a:t> memcached</a:t>
-            </a:r>
-            <a:r>
-              <a:rPr lang="en-US" sz="3000" dirty="0" spc="-2" kern="0">
+              <a:t> khóa</a:t>
+            </a:r>
+            <a:r>
+              <a:rPr lang="en-US" sz="3000" dirty="0" spc="2" kern="0">
                 <a:solidFill>
                   <a:srgbClr val="14161C"/>
                 </a:solidFill>
@@ -3692,10 +3637,10 @@
                 <a:ea typeface="Be Vietnam Pro ExtraBold" pitchFamily="34" charset="-122"/>
                 <a:cs typeface="Be Vietnam Pro ExtraBold" pitchFamily="34" charset="-120"/>
               </a:rPr>
-              <a:t> làm</a:t>
-            </a:r>
-            <a:r>
-              <a:rPr lang="en-US" sz="3000" dirty="0" spc="0" kern="0">
+              <a:t> cũ,</a:t>
+            </a:r>
+            <a:r>
+              <a:rPr lang="en-US" sz="3000" dirty="0" spc="-27" kern="0">
                 <a:solidFill>
                   <a:srgbClr val="14161C"/>
                 </a:solidFill>
@@ -3703,29 +3648,7 @@
                 <a:ea typeface="Be Vietnam Pro ExtraBold" pitchFamily="34" charset="-122"/>
                 <a:cs typeface="Be Vietnam Pro ExtraBold" pitchFamily="34" charset="-120"/>
               </a:rPr>
-              <a:t> sẵn,</a:t>
-            </a:r>
-            <a:r>
-              <a:rPr lang="en-US" sz="3000" dirty="0" spc="-27" kern="0">
-                <a:solidFill>
-                  <a:srgbClr val="14161C"/>
-                </a:solidFill>
-                <a:latin typeface="Be Vietnam Pro ExtraBold" pitchFamily="34" charset="0"/>
-                <a:ea typeface="Be Vietnam Pro ExtraBold" pitchFamily="34" charset="-122"/>
-                <a:cs typeface="Be Vietnam Pro ExtraBold" pitchFamily="34" charset="-120"/>
-              </a:rPr>
               <a:t> Redis</a:t>
-            </a:r>
-            <a:r>
-              <a:rPr lang="en-US" sz="3000" dirty="0" spc="-6" kern="0">
-                <a:solidFill>
-                  <a:srgbClr val="14161C"/>
-                </a:solidFill>
-                <a:latin typeface="Be Vietnam Pro ExtraBold" pitchFamily="34" charset="0"/>
-                <a:ea typeface="Be Vietnam Pro ExtraBold" pitchFamily="34" charset="-122"/>
-                <a:cs typeface="Be Vietnam Pro ExtraBold" pitchFamily="34" charset="-120"/>
-              </a:rPr>
-              <a:t> phải</a:t>
             </a:r>
             <a:r>
               <a:rPr lang="en-US" sz="3000" dirty="0" spc="2" kern="0">
@@ -7022,7 +6945,51 @@
                 <a:ea typeface="Be Vietnam Pro" pitchFamily="34" charset="-122"/>
                 <a:cs typeface="Be Vietnam Pro" pitchFamily="34" charset="-120"/>
               </a:rPr>
-              <a:t> trúc</a:t>
+              <a:t> trúc,</a:t>
+            </a:r>
+            <a:r>
+              <a:rPr lang="en-US" sz="2850" b="1" dirty="0" spc="-2" kern="0">
+                <a:solidFill>
+                  <a:srgbClr val="14161C"/>
+                </a:solidFill>
+                <a:latin typeface="Be Vietnam Pro" pitchFamily="34" charset="0"/>
+                <a:ea typeface="Be Vietnam Pro" pitchFamily="34" charset="-122"/>
+                <a:cs typeface="Be Vietnam Pro" pitchFamily="34" charset="-120"/>
+              </a:rPr>
+              <a:t> hoặc</a:t>
+            </a:r>
+            <a:r>
+              <a:rPr lang="en-US" sz="2850" b="1" dirty="0" spc="5" kern="0">
+                <a:solidFill>
+                  <a:srgbClr val="14161C"/>
+                </a:solidFill>
+                <a:latin typeface="Be Vietnam Pro" pitchFamily="34" charset="0"/>
+                <a:ea typeface="Be Vietnam Pro" pitchFamily="34" charset="-122"/>
+                <a:cs typeface="Be Vietnam Pro" pitchFamily="34" charset="-120"/>
+              </a:rPr>
+              <a:t> giá</a:t>
+            </a:r>
+            <a:r>
+              <a:rPr lang="en-US" sz="2850" b="1" dirty="0" spc="10" kern="0">
+                <a:solidFill>
+                  <a:srgbClr val="14161C"/>
+                </a:solidFill>
+                <a:latin typeface="Be Vietnam Pro" pitchFamily="34" charset="0"/>
+                <a:ea typeface="Be Vietnam Pro" pitchFamily="34" charset="-122"/>
+                <a:cs typeface="Be Vietnam Pro" pitchFamily="34" charset="-120"/>
+              </a:rPr>
+              <a:t> trị</a:t>
+            </a:r>
+            <a:r>
+              <a:rPr lang="en-US" sz="2850" b="1" dirty="0" spc="-15" kern="0">
+                <a:solidFill>
+                  <a:srgbClr val="14161C"/>
+                </a:solidFill>
+                <a:latin typeface="Be Vietnam Pro" pitchFamily="34" charset="0"/>
+                <a:ea typeface="Be Vietnam Pro" pitchFamily="34" charset="-122"/>
+                <a:cs typeface="Be Vietnam Pro" pitchFamily="34" charset="-120"/>
+              </a:rPr>
+              <a:t> trên</a:t>
             </a:r>
             <a:r>
               <a:rPr lang="en-US" sz="2850" b="1" dirty="0" spc="3" kern="0">
@@ -7033,65 +7000,10 @@
                 <a:ea typeface="Be Vietnam Pro" pitchFamily="34" charset="-122"/>
                 <a:cs typeface="Be Vietnam Pro" pitchFamily="34" charset="-120"/>
               </a:rPr>
-              <a:t> dữ</a:t>
-            </a:r>
-            <a:r>
-              <a:rPr lang="en-US" sz="2850" b="1" dirty="0" spc="1" kern="0">
-                <a:solidFill>
-                  <a:srgbClr val="14161C"/>
-                </a:solidFill>
-                <a:latin typeface="Be Vietnam Pro" pitchFamily="34" charset="0"/>
-                <a:ea typeface="Be Vietnam Pro" pitchFamily="34" charset="-122"/>
-                <a:cs typeface="Be Vietnam Pro" pitchFamily="34" charset="-120"/>
-              </a:rPr>
-              <a:t> liệu,</a:t>
+              <a:t> 1</a:t>
             </a:r>
             <a:r>
               <a:rPr lang="en-US" sz="2850" b="1" dirty="0" spc="4" kern="0">
-                <a:solidFill>
-                  <a:srgbClr val="14161C"/>
-                </a:solidFill>
-                <a:latin typeface="Be Vietnam Pro" pitchFamily="34" charset="0"/>
-                <a:ea typeface="Be Vietnam Pro" pitchFamily="34" charset="-122"/>
-                <a:cs typeface="Be Vietnam Pro" pitchFamily="34" charset="-120"/>
-              </a:rPr>
-              <a:t> giá</a:t>
-            </a:r>
-            <a:r>
-              <a:rPr lang="en-US" sz="2850" b="1" dirty="0" spc="10" kern="0">
-                <a:solidFill>
-                  <a:srgbClr val="14161C"/>
-                </a:solidFill>
-                <a:latin typeface="Be Vietnam Pro" pitchFamily="34" charset="0"/>
-                <a:ea typeface="Be Vietnam Pro" pitchFamily="34" charset="-122"/>
-                <a:cs typeface="Be Vietnam Pro" pitchFamily="34" charset="-120"/>
-              </a:rPr>
-              <a:t> trị</a:t>
-            </a:r>
-            <a:r>
-              <a:rPr lang="en-US" sz="2850" b="1" dirty="0" spc="-15" kern="0">
-                <a:solidFill>
-                  <a:srgbClr val="14161C"/>
-                </a:solidFill>
-                <a:latin typeface="Be Vietnam Pro" pitchFamily="34" charset="0"/>
-                <a:ea typeface="Be Vietnam Pro" pitchFamily="34" charset="-122"/>
-                <a:cs typeface="Be Vietnam Pro" pitchFamily="34" charset="-120"/>
-              </a:rPr>
-              <a:t> trên</a:t>
-            </a:r>
-            <a:r>
-              <a:rPr lang="en-US" sz="2850" b="1" dirty="0" spc="5" kern="0">
-                <a:solidFill>
-                  <a:srgbClr val="14161C"/>
-                </a:solidFill>
-                <a:latin typeface="Be Vietnam Pro" pitchFamily="34" charset="0"/>
-                <a:ea typeface="Be Vietnam Pro" pitchFamily="34" charset="-122"/>
-                <a:cs typeface="Be Vietnam Pro" pitchFamily="34" charset="-120"/>
-              </a:rPr>
-              <a:t> 1</a:t>
-            </a:r>
-            <a:r>
-              <a:rPr lang="en-US" sz="2850" b="1" dirty="0" spc="3" kern="0">
                 <a:solidFill>
                   <a:srgbClr val="14161C"/>
                 </a:solidFill>
@@ -7222,15 +7134,15 @@
               <a:buNone/>
             </a:pPr>
             <a:r>
-              <a:rPr lang="en-US" sz="2850" b="1" dirty="0" spc="3" kern="0">
-                <a:solidFill>
-                  <a:srgbClr val="14161C"/>
-                </a:solidFill>
-                <a:latin typeface="Be Vietnam Pro" pitchFamily="34" charset="0"/>
-                <a:ea typeface="Be Vietnam Pro" pitchFamily="34" charset="-122"/>
-                <a:cs typeface="Be Vietnam Pro" pitchFamily="34" charset="-120"/>
-              </a:rPr>
-              <a:t>Giữ dữ</a:t>
+              <a:rPr lang="en-US" sz="2850" b="1" dirty="0" spc="2" kern="0">
+                <a:solidFill>
+                  <a:srgbClr val="14161C"/>
+                </a:solidFill>
+                <a:latin typeface="Be Vietnam Pro" pitchFamily="34" charset="0"/>
+                <a:ea typeface="Be Vietnam Pro" pitchFamily="34" charset="-122"/>
+                <a:cs typeface="Be Vietnam Pro" pitchFamily="34" charset="-120"/>
+              </a:rPr>
+              <a:t>Dữ</a:t>
             </a:r>
             <a:r>
               <a:rPr lang="en-US" sz="2850" b="1" dirty="0" spc="1" kern="0">
@@ -9526,7 +9438,7 @@
               <a:t> cả</a:t>
             </a:r>
             <a:r>
-              <a:rPr lang="en-US" sz="3000" dirty="0" spc="0" kern="0">
+              <a:rPr lang="en-US" sz="3000" dirty="0" spc="-1" kern="0">
                 <a:solidFill>
                   <a:srgbClr val="14161C"/>
                 </a:solidFill>
@@ -9534,10 +9446,10 @@
                 <a:ea typeface="Be Vietnam Pro ExtraBold" pitchFamily="34" charset="-122"/>
                 <a:cs typeface="Be Vietnam Pro ExtraBold" pitchFamily="34" charset="-120"/>
               </a:rPr>
-              <a:t> hai</a:t>
-            </a:r>
-            <a:r>
-              <a:rPr lang="en-US" sz="3000" dirty="0" spc="-9" kern="0">
+              <a:t> hai,</a:t>
+            </a:r>
+            <a:r>
+              <a:rPr lang="en-US" sz="3000" dirty="0" spc="5" kern="0">
                 <a:solidFill>
                   <a:srgbClr val="14161C"/>
                 </a:solidFill>
@@ -9545,10 +9457,10 @@
                 <a:ea typeface="Be Vietnam Pro ExtraBold" pitchFamily="34" charset="-122"/>
                 <a:cs typeface="Be Vietnam Pro ExtraBold" pitchFamily="34" charset="-120"/>
               </a:rPr>
-              <a:t> phần</a:t>
-            </a:r>
-            <a:r>
-              <a:rPr lang="en-US" sz="3000" dirty="0" spc="-8" kern="0">
+              <a:t> đo</a:t>
+            </a:r>
+            <a:r>
+              <a:rPr lang="en-US" sz="3000" dirty="0" spc="0" kern="0">
                 <a:solidFill>
                   <a:srgbClr val="14161C"/>
                 </a:solidFill>
@@ -9556,10 +9468,10 @@
                 <a:ea typeface="Be Vietnam Pro ExtraBold" pitchFamily="34" charset="-122"/>
                 <a:cs typeface="Be Vietnam Pro ExtraBold" pitchFamily="34" charset="-120"/>
               </a:rPr>
-              <a:t> mềm,</a:t>
-            </a:r>
-            <a:r>
-              <a:rPr lang="en-US" sz="3000" dirty="0" spc="6" kern="0">
+              <a:t> ví</a:t>
+            </a:r>
+            <a:r>
+              <a:rPr lang="en-US" sz="3000" dirty="0" spc="-1" kern="0">
                 <a:solidFill>
                   <a:srgbClr val="14161C"/>
                 </a:solidFill>
@@ -9567,40 +9479,7 @@
                 <a:ea typeface="Be Vietnam Pro ExtraBold" pitchFamily="34" charset="-122"/>
                 <a:cs typeface="Be Vietnam Pro ExtraBold" pitchFamily="34" charset="-120"/>
               </a:rPr>
-              <a:t> đo</a:t>
-            </a:r>
-            <a:r>
-              <a:rPr lang="en-US" sz="3000" dirty="0" spc="-1" kern="0">
-                <a:solidFill>
-                  <a:srgbClr val="14161C"/>
-                </a:solidFill>
-                <a:latin typeface="Be Vietnam Pro ExtraBold" pitchFamily="34" charset="0"/>
-                <a:ea typeface="Be Vietnam Pro ExtraBold" pitchFamily="34" charset="-122"/>
-                <a:cs typeface="Be Vietnam Pro ExtraBold" pitchFamily="34" charset="-120"/>
-              </a:rPr>
-              <a:t> ví</a:t>
-            </a:r>
-            <a:r>
-              <a:rPr lang="en-US" sz="3000" dirty="0" spc="0" kern="0">
-                <a:solidFill>
-                  <a:srgbClr val="14161C"/>
-                </a:solidFill>
-                <a:latin typeface="Be Vietnam Pro ExtraBold" pitchFamily="34" charset="0"/>
-                <a:ea typeface="Be Vietnam Pro ExtraBold" pitchFamily="34" charset="-122"/>
-                <a:cs typeface="Be Vietnam Pro ExtraBold" pitchFamily="34" charset="-120"/>
-              </a:rPr>
-              <a:t> dụ</a:t>
-            </a:r>
-            <a:r>
-              <a:rPr lang="en-US" sz="3000" dirty="0" spc="-2" kern="0">
-                <a:solidFill>
-                  <a:srgbClr val="14161C"/>
-                </a:solidFill>
-                <a:latin typeface="Be Vietnam Pro ExtraBold" pitchFamily="34" charset="0"/>
-                <a:ea typeface="Be Vietnam Pro ExtraBold" pitchFamily="34" charset="-122"/>
-                <a:cs typeface="Be Vietnam Pro ExtraBold" pitchFamily="34" charset="-120"/>
-              </a:rPr>
-              <a:t> bitmap</a:t>
+              <a:t> dụ bitmap.</a:t>
             </a:r>
             <a:endParaRPr lang="en-US" sz="3000" dirty="0"/>
           </a:p>
